--- a/carpentry/intake-142/PowerPoint/Day-04_2026-11-03_Week-2.pptx
+++ b/carpentry/intake-142/PowerPoint/Day-04_2026-11-03_Week-2.pptx
@@ -2594,7 +2594,7 @@
           <a:p/>
           <a:p>
             <a:r>
-              <a:t>Page 39 lists ways to check a calculator result. Estimate first; work the operation backwards; inspect the entered expression; and, when needed, key it again carefully. What does a reverse subtraction check look like? Add the difference back to the subtracted amount and see whether the starting total is restored. For example, 4,375 plus 1,625 restores 6,000. Each check supplies a different kind of evidence. Re-entry may catch a mistyped digit, while an inverse or different setup can expose an error that repeated keys would preserve.</a:t>
+              <a:t>Page 59 lists ways to check a calculator result. Estimate first; work the operation backwards; inspect the entered expression; and, when needed, key it again carefully. What does a reverse subtraction check look like? Add the difference back to the subtracted amount and see whether the starting total is restored. For example, 4,375 plus 1,625 restores 6,000. Each check supplies a different kind of evidence. Re-entry may catch a mistyped digit, while an inverse or different setup can expose an error that repeated keys would preserve.</a:t>
             </a:r>
           </a:p>
         </p:txBody>
@@ -2670,7 +2670,7 @@
           <a:p/>
           <a:p>
             <a:r>
-              <a:t>The reminder on page 39 is to write the unit with the answer. A calculator shows a number, but it does not tell someone whether the number is millimetres, inches or a count of parts. Why is “4,375” incomplete on a shop drawing or cut list? The reader cannot know the intended size without the unit and context. Write 4,375 mm when that is the quantity being measured. Checking units also helps distinguish a perimeter, which is a length, from a different kind of measurement. Meaning belongs beside the numerical result.</a:t>
+              <a:t>The reminder on page 59 is to write the unit with the answer. A calculator shows a number, but it does not tell someone whether the number is millimetres, inches or a count of parts. Why is “4,375” incomplete on a shop drawing or cut list? The reader cannot know the intended size without the unit and context. Write 4,375 mm when that is the quantity being measured. Checking units also helps distinguish a perimeter, which is a length, from a different kind of measurement. Meaning belongs beside the numerical result.</a:t>
             </a:r>
           </a:p>
         </p:txBody>
@@ -3072,7 +3072,7 @@
           <a:p/>
           <a:p>
             <a:r>
-              <a:t>Complete 3B Q3 and 3C questions 2–3, adding an estimate and a check line to every solution. Then attempt two new Easy Numeracy Hub questions from the topics already taught. Which check fits an offcut? Add the used material and the offcut, including any stated kerf, to restore the stock. Which fits a hidden frame dimension? Substitute it into the complete perimeter. Choose the check because it matches the quantity, not because it is the quickest extra line.</a:t>
+              <a:t>Complete 3B Q3 and 3C questions 2–3, adding an estimate and a check line to every solution. Then attempt two new Level 1 Numeracy Hub questions from the topics already taught. Which check fits an offcut? Add the used material and the offcut, including any stated kerf, to restore the stock. Which fits a hidden frame dimension? Substitute it into the complete perimeter. Choose the check because it matches the quantity, not because it is the quickest extra line.</a:t>
             </a:r>
           </a:p>
         </p:txBody>
@@ -3148,7 +3148,7 @@
           <a:p/>
           <a:p>
             <a:r>
-              <a:t>Open Numeracy Hub's Order of Operations section and select Easy questions within the taught topics. Keep the expression before solving it. Why save the question as well as the answer? Without the original expression, you cannot later tell whether a correct-looking result belongs to the task you attempted. Complete the paper calculation and a checking line before using the displayed solution to review your method.</a:t>
+              <a:t>Open Numeracy Hub's Order of Operations section and select Level 1 questions within the taught topics. Keep the expression before solving it. Why save the question as well as the answer? Without the original expression, you cannot later tell whether a correct-looking result belongs to the task you attempted. Complete the paper calculation and a checking line before using the displayed solution to review your method.</a:t>
             </a:r>
           </a:p>
         </p:txBody>
@@ -3224,7 +3224,7 @@
           <a:p/>
           <a:p>
             <a:r>
-              <a:t>Start by comparing the two forms of 3B Q2: four sides added individually and one length-plus-width pair doubled. Then solve two Easy BEDMAS questions on paper. For each, select an estimate or different-method check before reviewing the tool's result. What makes a check useful? It must test a relationship or part of the setup that could be wrong. Retain the original question, your sequence and the checking line so the comparison remains understandable after you close Numeracy Hub.</a:t>
+              <a:t>Start by comparing the two forms of 3B Q2: four sides added individually and one length-plus-width pair doubled. Then solve two Level 1 BEDMAS questions on paper. For each, select an estimate or different-method check before reviewing the tool's result. What makes a check useful? It must test a relationship or part of the setup that could be wrong. Retain the original question, your sequence and the checking line so the comparison remains understandable after you close Numeracy Hub.</a:t>
             </a:r>
           </a:p>
         </p:txBody>
@@ -5429,7 +5429,7 @@
                 </a:solidFill>
                 <a:latin typeface="Arial"/>
               </a:rPr>
-              <a:t>Textbook Chapter 3 pp.45–51; Chapter 2 pp.31–33</a:t>
+              <a:t>Textbook Chapter 3 pp.69–75; Chapter 2 pp.51–53</a:t>
             </a:r>
           </a:p>
         </p:txBody>
@@ -6187,7 +6187,7 @@
                 </a:solidFill>
                 <a:latin typeface="Arial"/>
               </a:rPr>
-              <a:t>Textbook Chapter 3 pp.45–51; Chapter 2 pp.31–33</a:t>
+              <a:t>Textbook Chapter 3 pp.69–75; Chapter 2 pp.51–53</a:t>
             </a:r>
           </a:p>
         </p:txBody>
@@ -6387,7 +6387,7 @@
                 </a:solidFill>
                 <a:latin typeface="Arial"/>
               </a:rPr>
-              <a:t>Resources: Exercise Book 3A Q4–10 (p.19); 2A Q2–3 (p.13)</a:t>
+              <a:t>Resources: Exercise Book 3A Q4–10 (p.25); 2A Q2–3 (p.17)</a:t>
             </a:r>
           </a:p>
         </p:txBody>
@@ -7001,7 +7001,7 @@
                 </a:solidFill>
                 <a:latin typeface="Arial"/>
               </a:rPr>
-              <a:t>Textbook Chapter 3 pp.45–51; Chapter 2 pp.31–33</a:t>
+              <a:t>Textbook Chapter 3 pp.69–75; Chapter 2 pp.51–53</a:t>
             </a:r>
           </a:p>
         </p:txBody>
@@ -7757,7 +7757,7 @@
                 </a:solidFill>
                 <a:latin typeface="Arial"/>
               </a:rPr>
-              <a:t>Textbook Chapter 3 pp.45–51; Chapter 2 pp.31–33</a:t>
+              <a:t>Textbook Chapter 3 pp.69–75; Chapter 2 pp.51–53</a:t>
             </a:r>
           </a:p>
         </p:txBody>
@@ -8491,7 +8491,7 @@
                 </a:solidFill>
                 <a:latin typeface="Arial"/>
               </a:rPr>
-              <a:t>Textbook Chapter 3 pp.45–51; Chapter 2 pp.31–33</a:t>
+              <a:t>Textbook Chapter 3 pp.69–75; Chapter 2 pp.51–53</a:t>
             </a:r>
           </a:p>
         </p:txBody>
@@ -8691,7 +8691,7 @@
                 </a:solidFill>
                 <a:latin typeface="Arial"/>
               </a:rPr>
-              <a:t>Resources: Exercise Book 3A Q4–10 (p.19); 2A Q2–3 (p.13)</a:t>
+              <a:t>Resources: Exercise Book 3A Q4–10 (p.25); 2A Q2–3 (p.17)</a:t>
             </a:r>
           </a:p>
         </p:txBody>
@@ -9305,7 +9305,7 @@
                 </a:solidFill>
                 <a:latin typeface="Arial"/>
               </a:rPr>
-              <a:t>Textbook Chapter 3 pp.45–51; Chapter 2 pp.31–33</a:t>
+              <a:t>Textbook Chapter 3 pp.69–75; Chapter 2 pp.51–53</a:t>
             </a:r>
           </a:p>
         </p:txBody>
@@ -10081,7 +10081,7 @@
                 </a:solidFill>
                 <a:latin typeface="Arial"/>
               </a:rPr>
-              <a:t>Textbook Chapter 3 pp.45–51; Chapter 2 pp.31–33</a:t>
+              <a:t>Textbook Chapter 3 pp.69–75; Chapter 2 pp.51–53</a:t>
             </a:r>
           </a:p>
         </p:txBody>
@@ -11040,7 +11040,7 @@
                 </a:solidFill>
                 <a:latin typeface="Arial"/>
               </a:rPr>
-              <a:t>Textbook Chapter 3 pp.45–51; Chapter 2 pp.31–33</a:t>
+              <a:t>Textbook Chapter 3 pp.69–75; Chapter 2 pp.51–53</a:t>
             </a:r>
           </a:p>
         </p:txBody>
@@ -11751,7 +11751,7 @@
                 </a:solidFill>
                 <a:latin typeface="Arial"/>
               </a:rPr>
-              <a:t>Textbook Chapter 3 pp.45–51; Chapter 2 pp.31–33</a:t>
+              <a:t>Textbook Chapter 3 pp.69–75; Chapter 2 pp.51–53</a:t>
             </a:r>
           </a:p>
         </p:txBody>
@@ -12462,7 +12462,7 @@
                 </a:solidFill>
                 <a:latin typeface="Arial"/>
               </a:rPr>
-              <a:t>Textbook Chapter 3 pp.45–51; Chapter 2 pp.31–33</a:t>
+              <a:t>Textbook Chapter 3 pp.69–75; Chapter 2 pp.51–53</a:t>
             </a:r>
           </a:p>
         </p:txBody>
@@ -12662,7 +12662,7 @@
                 </a:solidFill>
                 <a:latin typeface="Arial"/>
               </a:rPr>
-              <a:t>Resources: Exercise Book 3A Q4–10 (p.19); 2A Q2–3 (p.13)</a:t>
+              <a:t>Resources: Exercise Book 3A Q4–10 (p.25); 2A Q2–3 (p.17)</a:t>
             </a:r>
           </a:p>
         </p:txBody>
@@ -16628,7 +16628,7 @@
                 </a:solidFill>
                 <a:latin typeface="Arial"/>
               </a:rPr>
-              <a:t>Textbook Chapter 3 pp.45–51; Chapter 2 pp.31–33</a:t>
+              <a:t>Textbook Chapter 3 pp.69–75; Chapter 2 pp.51–53</a:t>
             </a:r>
           </a:p>
         </p:txBody>
@@ -17314,7 +17314,7 @@
                 </a:solidFill>
                 <a:latin typeface="Arial"/>
               </a:rPr>
-              <a:t>Textbook Chapter 3 pp.45–51; Chapter 2 pp.31–33</a:t>
+              <a:t>Textbook Chapter 3 pp.69–75; Chapter 2 pp.51–53</a:t>
             </a:r>
           </a:p>
         </p:txBody>
@@ -18000,7 +18000,7 @@
                 </a:solidFill>
                 <a:latin typeface="Arial"/>
               </a:rPr>
-              <a:t>Textbook Chapter 3 pp.45–51; Chapter 2 pp.31–33</a:t>
+              <a:t>Textbook Chapter 3 pp.69–75; Chapter 2 pp.51–53</a:t>
             </a:r>
           </a:p>
         </p:txBody>
@@ -18200,7 +18200,7 @@
                 </a:solidFill>
                 <a:latin typeface="Arial"/>
               </a:rPr>
-              <a:t>Resources: Exercise Book 3A Q4–10 (p.19); 2A Q2–3 (p.13)</a:t>
+              <a:t>Resources: Exercise Book 3A Q4–10 (p.25); 2A Q2–3 (p.17)</a:t>
             </a:r>
           </a:p>
         </p:txBody>
@@ -19479,7 +19479,7 @@
                 </a:solidFill>
                 <a:latin typeface="Arial"/>
               </a:rPr>
-              <a:t>Textbook Chapter 2 p.39; Chapter 3 pp.44–51</a:t>
+              <a:t>Textbook Chapter 2 p.59; Chapter 3 pp.68–75</a:t>
             </a:r>
           </a:p>
         </p:txBody>
@@ -19679,7 +19679,7 @@
                 </a:solidFill>
                 <a:latin typeface="Arial"/>
               </a:rPr>
-              <a:t>Textbook Chapter 2 p.39; Chapter 3 pp.44–51</a:t>
+              <a:t>Textbook Chapter 2 p.59; Chapter 3 pp.68–75</a:t>
             </a:r>
           </a:p>
         </p:txBody>
@@ -19727,7 +19727,7 @@
                 </a:solidFill>
                 <a:latin typeface="Arial"/>
               </a:rPr>
-              <a:t>Exercise Book 1A Q20 (p.7); 3B Q2–3 (p.21); 3C Q2–3 (p.23)</a:t>
+              <a:t>Exercise Book 1A Q20 (p.7); 3B Q2–3 (p.27); 3C Q2–3 (p.29)</a:t>
             </a:r>
           </a:p>
         </p:txBody>
@@ -20389,7 +20389,7 @@
                 </a:solidFill>
                 <a:latin typeface="Arial"/>
               </a:rPr>
-              <a:t>Textbook Chapter 2 p.39; Chapter 3 pp.44–51</a:t>
+              <a:t>Textbook Chapter 2 p.59; Chapter 3 pp.68–75</a:t>
             </a:r>
           </a:p>
         </p:txBody>
@@ -20589,7 +20589,7 @@
                 </a:solidFill>
                 <a:latin typeface="Arial"/>
               </a:rPr>
-              <a:t>Resources: Exercise Book 1A Q20 (p.7); 3B Q2–3 (p.21); 3C Q2–3 (p.23)</a:t>
+              <a:t>Resources: Exercise Book 1A Q20 (p.7); 3B Q2–3 (p.27); 3C Q2–3 (p.29)</a:t>
             </a:r>
           </a:p>
         </p:txBody>
@@ -21338,7 +21338,7 @@
                 </a:solidFill>
                 <a:latin typeface="Arial"/>
               </a:rPr>
-              <a:t>Textbook Chapter 2 p.39; Chapter 3 pp.44–51</a:t>
+              <a:t>Textbook Chapter 2 p.59; Chapter 3 pp.68–75</a:t>
             </a:r>
           </a:p>
         </p:txBody>
@@ -22559,7 +22559,7 @@
                 </a:solidFill>
                 <a:latin typeface="Arial"/>
               </a:rPr>
-              <a:t>Textbook Chapter 2 p.39; Chapter 3 pp.44–51</a:t>
+              <a:t>Textbook Chapter 2 p.59; Chapter 3 pp.68–75</a:t>
             </a:r>
           </a:p>
         </p:txBody>
@@ -24470,7 +24470,7 @@
                 </a:solidFill>
                 <a:latin typeface="Arial"/>
               </a:rPr>
-              <a:t>Textbook  |  page 39</a:t>
+              <a:t>Textbook  |  page 59</a:t>
             </a:r>
           </a:p>
         </p:txBody>
@@ -24518,7 +24518,7 @@
                 </a:solidFill>
                 <a:latin typeface="Arial"/>
               </a:rPr>
-              <a:t>Textbook Chapter 2 p.39; Chapter 3 pp.44–51</a:t>
+              <a:t>Textbook Chapter 2 p.59; Chapter 3 pp.68–75</a:t>
             </a:r>
           </a:p>
         </p:txBody>
@@ -24590,7 +24590,7 @@
                 </a:solidFill>
                 <a:latin typeface="Arial"/>
               </a:rPr>
-              <a:t>Textbook p.39 · Checking a result: estimate, reverse and inspect the entry.</a:t>
+              <a:t>Textbook p.59 · Checking a result: estimate, reverse and inspect the entry.</a:t>
             </a:r>
           </a:p>
         </p:txBody>
@@ -25159,7 +25159,7 @@
                 </a:solidFill>
                 <a:latin typeface="Arial"/>
               </a:rPr>
-              <a:t>Textbook Chapter 3 pp.45–51; Chapter 2 pp.31–33</a:t>
+              <a:t>Textbook Chapter 3 pp.69–75; Chapter 2 pp.51–53</a:t>
             </a:r>
           </a:p>
         </p:txBody>
@@ -25359,7 +25359,7 @@
                 </a:solidFill>
                 <a:latin typeface="Arial"/>
               </a:rPr>
-              <a:t>Textbook Chapter 3 pp.45–51; Chapter 2 pp.31–33</a:t>
+              <a:t>Textbook Chapter 3 pp.69–75; Chapter 2 pp.51–53</a:t>
             </a:r>
           </a:p>
         </p:txBody>
@@ -25407,7 +25407,7 @@
                 </a:solidFill>
                 <a:latin typeface="Arial"/>
               </a:rPr>
-              <a:t>Exercise Book 3A Q4–10 (p.19); 2A Q2–3 (p.13)</a:t>
+              <a:t>Exercise Book 3A Q4–10 (p.25); 2A Q2–3 (p.17)</a:t>
             </a:r>
           </a:p>
         </p:txBody>
@@ -26021,7 +26021,7 @@
                 </a:solidFill>
                 <a:latin typeface="Arial"/>
               </a:rPr>
-              <a:t>Textbook  |  page 39</a:t>
+              <a:t>Textbook  |  page 59</a:t>
             </a:r>
           </a:p>
         </p:txBody>
@@ -26069,7 +26069,7 @@
                 </a:solidFill>
                 <a:latin typeface="Arial"/>
               </a:rPr>
-              <a:t>Textbook Chapter 2 p.39; Chapter 3 pp.44–51</a:t>
+              <a:t>Textbook Chapter 2 p.59; Chapter 3 pp.68–75</a:t>
             </a:r>
           </a:p>
         </p:txBody>
@@ -26141,7 +26141,7 @@
                 </a:solidFill>
                 <a:latin typeface="Arial"/>
               </a:rPr>
-              <a:t>Textbook p.39 · Record the unit with the checked answer.</a:t>
+              <a:t>Textbook p.59 · Record the unit with the checked answer.</a:t>
             </a:r>
           </a:p>
         </p:txBody>
@@ -26755,7 +26755,7 @@
                 </a:solidFill>
                 <a:latin typeface="Arial"/>
               </a:rPr>
-              <a:t>Textbook Chapter 2 p.39; Chapter 3 pp.44–51</a:t>
+              <a:t>Textbook Chapter 2 p.59; Chapter 3 pp.68–75</a:t>
             </a:r>
           </a:p>
         </p:txBody>
@@ -27513,7 +27513,7 @@
                 </a:solidFill>
                 <a:latin typeface="Arial"/>
               </a:rPr>
-              <a:t>Textbook Chapter 2 p.39; Chapter 3 pp.44–51</a:t>
+              <a:t>Textbook Chapter 2 p.59; Chapter 3 pp.68–75</a:t>
             </a:r>
           </a:p>
         </p:txBody>
@@ -27713,7 +27713,7 @@
                 </a:solidFill>
                 <a:latin typeface="Arial"/>
               </a:rPr>
-              <a:t>Resources: Exercise Book 1A Q20 (p.7); 3B Q2–3 (p.21); 3C Q2–3 (p.23)</a:t>
+              <a:t>Resources: Exercise Book 1A Q20 (p.7); 3B Q2–3 (p.27); 3C Q2–3 (p.29)</a:t>
             </a:r>
           </a:p>
         </p:txBody>
@@ -28327,7 +28327,7 @@
                 </a:solidFill>
                 <a:latin typeface="Arial"/>
               </a:rPr>
-              <a:t>Textbook Chapter 2 p.39; Chapter 3 pp.44–51</a:t>
+              <a:t>Textbook Chapter 2 p.59; Chapter 3 pp.68–75</a:t>
             </a:r>
           </a:p>
         </p:txBody>
@@ -29083,7 +29083,7 @@
                 </a:solidFill>
                 <a:latin typeface="Arial"/>
               </a:rPr>
-              <a:t>Textbook Chapter 2 p.39; Chapter 3 pp.44–51</a:t>
+              <a:t>Textbook Chapter 2 p.59; Chapter 3 pp.68–75</a:t>
             </a:r>
           </a:p>
         </p:txBody>
@@ -29865,7 +29865,7 @@
                 </a:solidFill>
                 <a:latin typeface="Arial"/>
               </a:rPr>
-              <a:t>Textbook Chapter 2 p.39; Chapter 3 pp.44–51</a:t>
+              <a:t>Textbook Chapter 2 p.59; Chapter 3 pp.68–75</a:t>
             </a:r>
           </a:p>
         </p:txBody>
@@ -30065,7 +30065,7 @@
                 </a:solidFill>
                 <a:latin typeface="Arial"/>
               </a:rPr>
-              <a:t>Resources: Exercise Book 1A Q20 (p.7); 3B Q2–3 (p.21); 3C Q2–3 (p.23)</a:t>
+              <a:t>Resources: Exercise Book 1A Q20 (p.7); 3B Q2–3 (p.27); 3C Q2–3 (p.29)</a:t>
             </a:r>
           </a:p>
         </p:txBody>
@@ -30679,7 +30679,7 @@
                 </a:solidFill>
                 <a:latin typeface="Arial"/>
               </a:rPr>
-              <a:t>Textbook Chapter 2 p.39; Chapter 3 pp.44–51</a:t>
+              <a:t>Textbook Chapter 2 p.59; Chapter 3 pp.68–75</a:t>
             </a:r>
           </a:p>
         </p:txBody>
@@ -31455,7 +31455,7 @@
                 </a:solidFill>
                 <a:latin typeface="Arial"/>
               </a:rPr>
-              <a:t>Textbook Chapter 2 p.39; Chapter 3 pp.44–51</a:t>
+              <a:t>Textbook Chapter 2 p.59; Chapter 3 pp.68–75</a:t>
             </a:r>
           </a:p>
         </p:txBody>
@@ -31685,7 +31685,7 @@
                 </a:solidFill>
                 <a:latin typeface="Arial"/>
               </a:rPr>
-              <a:t>Independent practice: Solve two Easy Numeracy Hub BEDMAS questions from taught topics on paper.</a:t>
+              <a:t>Independent practice: Solve two Level 1 Numeracy Hub BEDMAS questions from taught topics on paper.</a:t>
             </a:r>
           </a:p>
         </p:txBody>
@@ -32414,7 +32414,7 @@
                 </a:solidFill>
                 <a:latin typeface="Arial"/>
               </a:rPr>
-              <a:t>Textbook Chapter 2 p.39; Chapter 3 pp.44–51</a:t>
+              <a:t>Textbook Chapter 2 p.59; Chapter 3 pp.68–75</a:t>
             </a:r>
           </a:p>
         </p:txBody>
@@ -33125,7 +33125,7 @@
                 </a:solidFill>
                 <a:latin typeface="Arial"/>
               </a:rPr>
-              <a:t>Textbook Chapter 2 p.39; Chapter 3 pp.44–51</a:t>
+              <a:t>Textbook Chapter 2 p.59; Chapter 3 pp.68–75</a:t>
             </a:r>
           </a:p>
         </p:txBody>
@@ -33812,7 +33812,7 @@
                 </a:solidFill>
                 <a:latin typeface="Arial"/>
               </a:rPr>
-              <a:t>Textbook Chapter 3 pp.45–51; Chapter 2 pp.31–33</a:t>
+              <a:t>Textbook Chapter 3 pp.69–75; Chapter 2 pp.51–53</a:t>
             </a:r>
           </a:p>
         </p:txBody>
@@ -34012,7 +34012,7 @@
                 </a:solidFill>
                 <a:latin typeface="Arial"/>
               </a:rPr>
-              <a:t>Resources: Exercise Book 3A Q4–10 (p.19); 2A Q2–3 (p.13)</a:t>
+              <a:t>Resources: Exercise Book 3A Q4–10 (p.25); 2A Q2–3 (p.17)</a:t>
             </a:r>
           </a:p>
         </p:txBody>
@@ -34626,7 +34626,7 @@
                 </a:solidFill>
                 <a:latin typeface="Arial"/>
               </a:rPr>
-              <a:t>Textbook Chapter 2 p.39; Chapter 3 pp.44–51</a:t>
+              <a:t>Textbook Chapter 2 p.59; Chapter 3 pp.68–75</a:t>
             </a:r>
           </a:p>
         </p:txBody>
@@ -34826,7 +34826,7 @@
                 </a:solidFill>
                 <a:latin typeface="Arial"/>
               </a:rPr>
-              <a:t>Resources: Exercise Book 1A Q20 (p.7); 3B Q2–3 (p.21); 3C Q2–3 (p.23)</a:t>
+              <a:t>Resources: Exercise Book 1A Q20 (p.7); 3B Q2–3 (p.27); 3C Q2–3 (p.29)</a:t>
             </a:r>
           </a:p>
         </p:txBody>
@@ -35440,7 +35440,7 @@
                 </a:solidFill>
                 <a:latin typeface="Arial"/>
               </a:rPr>
-              <a:t>Textbook Chapter 2 p.39; Chapter 3 pp.44–51</a:t>
+              <a:t>Textbook Chapter 2 p.59; Chapter 3 pp.68–75</a:t>
             </a:r>
           </a:p>
         </p:txBody>
@@ -36127,7 +36127,7 @@
                 </a:solidFill>
                 <a:latin typeface="Arial"/>
               </a:rPr>
-              <a:t>Textbook Chapter 2 p.39; Chapter 3 pp.44–51</a:t>
+              <a:t>Textbook Chapter 2 p.59; Chapter 3 pp.68–75</a:t>
             </a:r>
           </a:p>
         </p:txBody>
@@ -36327,7 +36327,7 @@
                 </a:solidFill>
                 <a:latin typeface="Arial"/>
               </a:rPr>
-              <a:t>Resources: Exercise Book 1A Q20 (p.7); 3B Q2–3 (p.21); 3C Q2–3 (p.23)</a:t>
+              <a:t>Resources: Exercise Book 1A Q20 (p.7); 3B Q2–3 (p.27); 3C Q2–3 (p.29)</a:t>
             </a:r>
           </a:p>
         </p:txBody>
@@ -37076,7 +37076,7 @@
                 </a:solidFill>
                 <a:latin typeface="Arial"/>
               </a:rPr>
-              <a:t>Textbook Chapter 3 pp.45–51; Chapter 2 pp.31–33</a:t>
+              <a:t>Textbook Chapter 3 pp.69–75; Chapter 2 pp.51–53</a:t>
             </a:r>
           </a:p>
         </p:txBody>
@@ -38321,7 +38321,7 @@
                 </a:solidFill>
                 <a:latin typeface="Arial"/>
               </a:rPr>
-              <a:t>Textbook Chapter 3 pp.45–51; Chapter 2 pp.31–33</a:t>
+              <a:t>Textbook Chapter 3 pp.69–75; Chapter 2 pp.51–53</a:t>
             </a:r>
           </a:p>
         </p:txBody>
@@ -40197,7 +40197,7 @@
                 </a:solidFill>
                 <a:latin typeface="Arial"/>
               </a:rPr>
-              <a:t>Textbook  |  page 47</a:t>
+              <a:t>Textbook  |  page 71</a:t>
             </a:r>
           </a:p>
         </p:txBody>
@@ -40245,7 +40245,7 @@
                 </a:solidFill>
                 <a:latin typeface="Arial"/>
               </a:rPr>
-              <a:t>Textbook Chapter 3 pp.45–51; Chapter 2 pp.31–33</a:t>
+              <a:t>Textbook Chapter 3 pp.69–75; Chapter 2 pp.51–53</a:t>
             </a:r>
           </a:p>
         </p:txBody>
@@ -40317,7 +40317,7 @@
                 </a:solidFill>
                 <a:latin typeface="Arial"/>
               </a:rPr>
-              <a:t>Textbook p.47 · Example 3.5: identify what the square belongs to.</a:t>
+              <a:t>Textbook p.71 · Example 3.5: identify what the square belongs to.</a:t>
             </a:r>
           </a:p>
         </p:txBody>
@@ -40883,7 +40883,7 @@
                 </a:solidFill>
                 <a:latin typeface="Arial"/>
               </a:rPr>
-              <a:t>Textbook  |  page 48</a:t>
+              <a:t>Textbook  |  page 72</a:t>
             </a:r>
           </a:p>
         </p:txBody>
@@ -40931,7 +40931,7 @@
                 </a:solidFill>
                 <a:latin typeface="Arial"/>
               </a:rPr>
-              <a:t>Textbook Chapter 3 pp.45–51; Chapter 2 pp.31–33</a:t>
+              <a:t>Textbook Chapter 3 pp.69–75; Chapter 2 pp.51–53</a:t>
             </a:r>
           </a:p>
         </p:txBody>
@@ -41003,7 +41003,7 @@
                 </a:solidFill>
                 <a:latin typeface="Arial"/>
               </a:rPr>
-              <a:t>Textbook p.48 · Example 3.6: one root over a sum versus two separate roots.</a:t>
+              <a:t>Textbook p.72 · Example 3.6: one root over a sum versus two separate roots.</a:t>
             </a:r>
           </a:p>
         </p:txBody>

--- a/carpentry/intake-142/PowerPoint/Day-04_2026-11-03_Week-2.pptx
+++ b/carpentry/intake-142/PowerPoint/Day-04_2026-11-03_Week-2.pptx
@@ -18473,6 +18473,104 @@
           </a:p>
         </p:txBody>
       </p:sp>
+      <p:sp>
+        <p:nvSpPr>
+          <p:cNvPr id="22" name="Play quiz W02-L03"/>
+          <p:cNvSpPr txBox="1"/>
+          <p:nvPr/>
+        </p:nvSpPr>
+        <p:spPr>
+          <a:xfrm>
+            <a:off x="6355080" y="6606540"/>
+            <a:ext cx="822960" cy="210312"/>
+          </a:xfrm>
+          <a:prstGeom prst="rect">
+            <a:avLst/>
+          </a:prstGeom>
+          <a:noFill/>
+        </p:spPr>
+        <p:txBody>
+          <a:bodyPr wrap="square" lIns="0" rIns="0" tIns="0" bIns="0" anchor="t">
+            <a:normAutofit fontScale="100000" lnSpcReduction="0"/>
+          </a:bodyPr>
+          <a:lstStyle/>
+          <a:p>
+            <a:pPr>
+              <a:spcBef>
+                <a:spcPts val="0"/>
+              </a:spcBef>
+              <a:spcAft>
+                <a:spcPts val="0"/>
+              </a:spcAft>
+              <a:defRPr sz="1000" b="0">
+                <a:solidFill>
+                  <a:srgbClr val="D0002B"/>
+                </a:solidFill>
+                <a:latin typeface="Arial"/>
+              </a:defRPr>
+            </a:pPr>
+            <a:r>
+              <a:rPr sz="1000">
+                <a:solidFill>
+                  <a:srgbClr val="F7F8FC"/>
+                </a:solidFill>
+                <a:latin typeface="Arial"/>
+                <a:hlinkClick r:id="rId8"/>
+              </a:rPr>
+              <a:t>Play quiz</a:t>
+            </a:r>
+          </a:p>
+        </p:txBody>
+      </p:sp>
+      <p:sp>
+        <p:nvSpPr>
+          <p:cNvPr id="23" name="Quiz PDF W02-L03"/>
+          <p:cNvSpPr txBox="1"/>
+          <p:nvPr/>
+        </p:nvSpPr>
+        <p:spPr>
+          <a:xfrm>
+            <a:off x="7296912" y="6606540"/>
+            <a:ext cx="1005840" cy="210312"/>
+          </a:xfrm>
+          <a:prstGeom prst="rect">
+            <a:avLst/>
+          </a:prstGeom>
+          <a:noFill/>
+        </p:spPr>
+        <p:txBody>
+          <a:bodyPr wrap="square" lIns="0" rIns="0" tIns="0" bIns="0" anchor="t">
+            <a:normAutofit fontScale="100000" lnSpcReduction="0"/>
+          </a:bodyPr>
+          <a:lstStyle/>
+          <a:p>
+            <a:pPr>
+              <a:spcBef>
+                <a:spcPts val="0"/>
+              </a:spcBef>
+              <a:spcAft>
+                <a:spcPts val="0"/>
+              </a:spcAft>
+              <a:defRPr sz="1000" b="0">
+                <a:solidFill>
+                  <a:srgbClr val="D0002B"/>
+                </a:solidFill>
+                <a:latin typeface="Arial"/>
+              </a:defRPr>
+            </a:pPr>
+            <a:r>
+              <a:rPr sz="1000">
+                <a:solidFill>
+                  <a:srgbClr val="F7F8FC"/>
+                </a:solidFill>
+                <a:latin typeface="Arial"/>
+                <a:hlinkClick r:id="rId9"/>
+              </a:rPr>
+              <a:t>Quiz PDF</a:t>
+            </a:r>
+          </a:p>
+        </p:txBody>
+      </p:sp>
     </p:spTree>
   </p:cSld>
   <p:clrMapOvr>
@@ -36596,6 +36694,104 @@
                 <a:latin typeface="Arial"/>
               </a:rPr>
               <a:t>Day 04  •  2026-11-03  •  42</a:t>
+            </a:r>
+          </a:p>
+        </p:txBody>
+      </p:sp>
+      <p:sp>
+        <p:nvSpPr>
+          <p:cNvPr id="22" name="Play quiz W02-L04"/>
+          <p:cNvSpPr txBox="1"/>
+          <p:nvPr/>
+        </p:nvSpPr>
+        <p:spPr>
+          <a:xfrm>
+            <a:off x="6355080" y="6606540"/>
+            <a:ext cx="822960" cy="210312"/>
+          </a:xfrm>
+          <a:prstGeom prst="rect">
+            <a:avLst/>
+          </a:prstGeom>
+          <a:noFill/>
+        </p:spPr>
+        <p:txBody>
+          <a:bodyPr wrap="square" lIns="0" rIns="0" tIns="0" bIns="0" anchor="t">
+            <a:normAutofit fontScale="100000" lnSpcReduction="0"/>
+          </a:bodyPr>
+          <a:lstStyle/>
+          <a:p>
+            <a:pPr>
+              <a:spcBef>
+                <a:spcPts val="0"/>
+              </a:spcBef>
+              <a:spcAft>
+                <a:spcPts val="0"/>
+              </a:spcAft>
+              <a:defRPr sz="1000" b="0">
+                <a:solidFill>
+                  <a:srgbClr val="D0002B"/>
+                </a:solidFill>
+                <a:latin typeface="Arial"/>
+              </a:defRPr>
+            </a:pPr>
+            <a:r>
+              <a:rPr sz="1000">
+                <a:solidFill>
+                  <a:srgbClr val="F7F8FC"/>
+                </a:solidFill>
+                <a:latin typeface="Arial"/>
+                <a:hlinkClick r:id="rId8"/>
+              </a:rPr>
+              <a:t>Play quiz</a:t>
+            </a:r>
+          </a:p>
+        </p:txBody>
+      </p:sp>
+      <p:sp>
+        <p:nvSpPr>
+          <p:cNvPr id="23" name="Quiz PDF W02-L04"/>
+          <p:cNvSpPr txBox="1"/>
+          <p:nvPr/>
+        </p:nvSpPr>
+        <p:spPr>
+          <a:xfrm>
+            <a:off x="7296912" y="6606540"/>
+            <a:ext cx="1005840" cy="210312"/>
+          </a:xfrm>
+          <a:prstGeom prst="rect">
+            <a:avLst/>
+          </a:prstGeom>
+          <a:noFill/>
+        </p:spPr>
+        <p:txBody>
+          <a:bodyPr wrap="square" lIns="0" rIns="0" tIns="0" bIns="0" anchor="t">
+            <a:normAutofit fontScale="100000" lnSpcReduction="0"/>
+          </a:bodyPr>
+          <a:lstStyle/>
+          <a:p>
+            <a:pPr>
+              <a:spcBef>
+                <a:spcPts val="0"/>
+              </a:spcBef>
+              <a:spcAft>
+                <a:spcPts val="0"/>
+              </a:spcAft>
+              <a:defRPr sz="1000" b="0">
+                <a:solidFill>
+                  <a:srgbClr val="D0002B"/>
+                </a:solidFill>
+                <a:latin typeface="Arial"/>
+              </a:defRPr>
+            </a:pPr>
+            <a:r>
+              <a:rPr sz="1000">
+                <a:solidFill>
+                  <a:srgbClr val="F7F8FC"/>
+                </a:solidFill>
+                <a:latin typeface="Arial"/>
+                <a:hlinkClick r:id="rId9"/>
+              </a:rPr>
+              <a:t>Quiz PDF</a:t>
             </a:r>
           </a:p>
         </p:txBody>
